--- a/student_files/exercises/Unit_08_ElectricityAndHydrogenDemand/Unit_08_exercise_1a2.pptx
+++ b/student_files/exercises/Unit_08_ElectricityAndHydrogenDemand/Unit_08_exercise_1a2.pptx
@@ -263,7 +263,7 @@
           <a:p>
             <a:fld id="{ADE9E86A-6679-4EC8-847C-9F954F45BF68}" type="datetimeFigureOut">
               <a:rPr lang="de-DE" smtClean="0"/>
-              <a:t>21.11.2022</a:t>
+              <a:t>26.03.2025</a:t>
             </a:fld>
             <a:endParaRPr lang="de-DE"/>
           </a:p>
@@ -341,7 +341,7 @@
           <a:p>
             <a:fld id="{2748E8B7-5326-4A3E-8AE4-83D3CDA8A9FC}" type="slidenum">
               <a:rPr lang="de-DE" smtClean="0"/>
-              <a:t>‹Nr.›</a:t>
+              <a:t>‹#›</a:t>
             </a:fld>
             <a:endParaRPr lang="de-DE"/>
           </a:p>
@@ -440,7 +440,7 @@
           <a:p>
             <a:fld id="{E313C419-10E8-4216-A6CC-B7C8A23909AD}" type="datetimeFigureOut">
               <a:rPr lang="de-DE" smtClean="0"/>
-              <a:t>21.11.2022</a:t>
+              <a:t>26.03.2025</a:t>
             </a:fld>
             <a:endParaRPr lang="de-DE"/>
           </a:p>
@@ -598,7 +598,7 @@
           <a:p>
             <a:fld id="{FF66CAD1-FD47-46B0-9C16-1B81F4E690E0}" type="slidenum">
               <a:rPr lang="de-DE" smtClean="0"/>
-              <a:t>‹Nr.›</a:t>
+              <a:t>‹#›</a:t>
             </a:fld>
             <a:endParaRPr lang="de-DE"/>
           </a:p>
@@ -1255,7 +1255,7 @@
             <a:fld id="{A52F4D17-1AD6-42D9-B93A-EB002C62F438}" type="slidenum">
               <a:rPr lang="de-DE" smtClean="0"/>
               <a:pPr/>
-              <a:t>‹Nr.›</a:t>
+              <a:t>‹#›</a:t>
             </a:fld>
             <a:endParaRPr lang="de-DE"/>
           </a:p>
@@ -1381,7 +1381,7 @@
             <a:fld id="{A52F4D17-1AD6-42D9-B93A-EB002C62F438}" type="slidenum">
               <a:rPr lang="de-DE" smtClean="0"/>
               <a:pPr/>
-              <a:t>‹Nr.›</a:t>
+              <a:t>‹#›</a:t>
             </a:fld>
             <a:endParaRPr lang="de-DE"/>
           </a:p>
@@ -1615,7 +1615,7 @@
             <a:fld id="{A52F4D17-1AD6-42D9-B93A-EB002C62F438}" type="slidenum">
               <a:rPr lang="de-DE" smtClean="0"/>
               <a:pPr/>
-              <a:t>‹Nr.›</a:t>
+              <a:t>‹#›</a:t>
             </a:fld>
             <a:endParaRPr lang="de-DE"/>
           </a:p>
@@ -1698,7 +1698,7 @@
             <a:fld id="{A52F4D17-1AD6-42D9-B93A-EB002C62F438}" type="slidenum">
               <a:rPr lang="de-DE" smtClean="0"/>
               <a:pPr/>
-              <a:t>‹Nr.›</a:t>
+              <a:t>‹#›</a:t>
             </a:fld>
             <a:endParaRPr lang="de-DE"/>
           </a:p>
@@ -2922,7 +2922,7 @@
           <a:p>
             <a:pPr algn="ctr"/>
             <a:r>
-              <a:rPr lang="en-US" cap="none">
+              <a:rPr lang="en-US" cap="none" dirty="0">
                 <a:solidFill>
                   <a:prstClr val="white"/>
                 </a:solidFill>
@@ -2940,12 +2940,18 @@
                 </a:solidFill>
                 <a:cs typeface="Arial" panose="020B0604020202020204" pitchFamily="34" charset="0"/>
               </a:rPr>
-              <a:t>Nov. – Dec. 2022</a:t>
-            </a:r>
+              <a:t>March 2025</a:t>
+            </a:r>
+            <a:endParaRPr lang="en-US" cap="none" dirty="0">
+              <a:solidFill>
+                <a:prstClr val="white"/>
+              </a:solidFill>
+              <a:cs typeface="Arial" panose="020B0604020202020204" pitchFamily="34" charset="0"/>
+            </a:endParaRPr>
           </a:p>
           <a:p>
             <a:pPr algn="ctr"/>
-            <a:endParaRPr lang="en-US" cap="none">
+            <a:endParaRPr lang="en-US" cap="none" dirty="0">
               <a:solidFill>
                 <a:prstClr val="white"/>
               </a:solidFill>
@@ -5621,6 +5627,21 @@
 </file>
 
 <file path=customXml/item1.xml><?xml version="1.0" encoding="utf-8"?>
+<?mso-contentType ?>
+<FormTemplates xmlns="http://schemas.microsoft.com/sharepoint/v3/contenttype/forms">
+  <Display>DocumentLibraryForm</Display>
+  <Edit>DocumentLibraryForm</Edit>
+  <New>DocumentLibraryForm</New>
+</FormTemplates>
+</file>
+
+<file path=customXml/item2.xml><?xml version="1.0" encoding="utf-8"?>
+<p:properties xmlns:p="http://schemas.microsoft.com/office/2006/metadata/properties" xmlns:xsi="http://www.w3.org/2001/XMLSchema-instance" xmlns:pc="http://schemas.microsoft.com/office/infopath/2007/PartnerControls">
+  <documentManagement/>
+</p:properties>
+</file>
+
+<file path=customXml/item3.xml><?xml version="1.0" encoding="utf-8"?>
 <ct:contentTypeSchema xmlns:ct="http://schemas.microsoft.com/office/2006/metadata/contentType" xmlns:ma="http://schemas.microsoft.com/office/2006/metadata/properties/metaAttributes" ct:_="" ma:_="" ma:contentTypeName="Dokument" ma:contentTypeID="0x010100D180314A710F7A4EB1047E73480405AC" ma:contentTypeVersion="2" ma:contentTypeDescription="Ein neues Dokument erstellen." ma:contentTypeScope="" ma:versionID="5fce66a760adaa0c3bc41a29ccc7320c">
   <xsd:schema xmlns:xsd="http://www.w3.org/2001/XMLSchema" xmlns:xs="http://www.w3.org/2001/XMLSchema" xmlns:p="http://schemas.microsoft.com/office/2006/metadata/properties" xmlns:ns2="d7b0c8ab-ab56-4bff-bbcf-7cef73c6fd20" targetNamespace="http://schemas.microsoft.com/office/2006/metadata/properties" ma:root="true" ma:fieldsID="6ba31731252026cfbdc8e38cee30aacc" ns2:_="">
     <xsd:import namespace="d7b0c8ab-ab56-4bff-bbcf-7cef73c6fd20"/>
@@ -5752,22 +5773,24 @@
 </ct:contentTypeSchema>
 </file>
 
-<file path=customXml/item2.xml><?xml version="1.0" encoding="utf-8"?>
-<p:properties xmlns:p="http://schemas.microsoft.com/office/2006/metadata/properties" xmlns:xsi="http://www.w3.org/2001/XMLSchema-instance" xmlns:pc="http://schemas.microsoft.com/office/infopath/2007/PartnerControls">
-  <documentManagement/>
-</p:properties>
+<file path=customXml/itemProps1.xml><?xml version="1.0" encoding="utf-8"?>
+<ds:datastoreItem xmlns:ds="http://schemas.openxmlformats.org/officeDocument/2006/customXml" ds:itemID="{91A508FC-C280-40AD-8398-BAA377701E66}">
+  <ds:schemaRefs>
+    <ds:schemaRef ds:uri="http://schemas.microsoft.com/sharepoint/v3/contenttype/forms"/>
+  </ds:schemaRefs>
+</ds:datastoreItem>
 </file>
 
-<file path=customXml/item3.xml><?xml version="1.0" encoding="utf-8"?>
-<?mso-contentType ?>
-<FormTemplates xmlns="http://schemas.microsoft.com/sharepoint/v3/contenttype/forms">
-  <Display>DocumentLibraryForm</Display>
-  <Edit>DocumentLibraryForm</Edit>
-  <New>DocumentLibraryForm</New>
-</FormTemplates>
+<file path=customXml/itemProps2.xml><?xml version="1.0" encoding="utf-8"?>
+<ds:datastoreItem xmlns:ds="http://schemas.openxmlformats.org/officeDocument/2006/customXml" ds:itemID="{BEBFB196-69DD-47B3-A2FC-0C63F3CA58CB}">
+  <ds:schemaRefs>
+    <ds:schemaRef ds:uri="http://schemas.microsoft.com/office/2006/metadata/properties"/>
+    <ds:schemaRef ds:uri="http://schemas.microsoft.com/office/infopath/2007/PartnerControls"/>
+  </ds:schemaRefs>
+</ds:datastoreItem>
 </file>
 
-<file path=customXml/itemProps1.xml><?xml version="1.0" encoding="utf-8"?>
+<file path=customXml/itemProps3.xml><?xml version="1.0" encoding="utf-8"?>
 <ds:datastoreItem xmlns:ds="http://schemas.openxmlformats.org/officeDocument/2006/customXml" ds:itemID="{9DD8BCB8-3A48-4D84-8E08-2A3E06938E31}">
   <ds:schemaRefs>
     <ds:schemaRef ds:uri="d7b0c8ab-ab56-4bff-bbcf-7cef73c6fd20"/>
@@ -5783,21 +5806,4 @@
     <ds:schemaRef ds:uri="http://www.w3.org/2001/XMLSchema"/>
   </ds:schemaRefs>
 </ds:datastoreItem>
-</file>
-
-<file path=customXml/itemProps2.xml><?xml version="1.0" encoding="utf-8"?>
-<ds:datastoreItem xmlns:ds="http://schemas.openxmlformats.org/officeDocument/2006/customXml" ds:itemID="{BEBFB196-69DD-47B3-A2FC-0C63F3CA58CB}">
-  <ds:schemaRefs>
-    <ds:schemaRef ds:uri="http://schemas.microsoft.com/office/2006/metadata/properties"/>
-    <ds:schemaRef ds:uri="http://schemas.microsoft.com/office/infopath/2007/PartnerControls"/>
-  </ds:schemaRefs>
-</ds:datastoreItem>
-</file>
-
-<file path=customXml/itemProps3.xml><?xml version="1.0" encoding="utf-8"?>
-<ds:datastoreItem xmlns:ds="http://schemas.openxmlformats.org/officeDocument/2006/customXml" ds:itemID="{91A508FC-C280-40AD-8398-BAA377701E66}">
-  <ds:schemaRefs>
-    <ds:schemaRef ds:uri="http://schemas.microsoft.com/sharepoint/v3/contenttype/forms"/>
-  </ds:schemaRefs>
-</ds:datastoreItem>
 </file>